--- a/reports/BRANCH_MATARAM_PERFORMANCE_SUMMARY_20260826_INARA.pptx
+++ b/reports/BRANCH_MATARAM_PERFORMANCE_SUMMARY_20260826_INARA.pptx
@@ -22131,7 +22131,7 @@
                           </a:solidFill>
                           <a:latin typeface="Arial"/>
                         </a:rPr>
-                        <a:t>798</a:t>
+                        <a:t>856</a:t>
                       </a:r>
                     </a:p>
                   </a:txBody>
@@ -22178,7 +22178,7 @@
                           </a:solidFill>
                           <a:latin typeface="Arial"/>
                         </a:rPr>
-                        <a:t>1.786</a:t>
+                        <a:t>1.834</a:t>
                       </a:r>
                     </a:p>
                   </a:txBody>
@@ -22225,7 +22225,7 @@
                           </a:solidFill>
                           <a:latin typeface="Arial"/>
                         </a:rPr>
-                        <a:t>13.846</a:t>
+                        <a:t>13.772</a:t>
                       </a:r>
                     </a:p>
                   </a:txBody>
@@ -22272,7 +22272,7 @@
                           </a:solidFill>
                           <a:latin typeface="Arial"/>
                         </a:rPr>
-                        <a:t>1.835</a:t>
+                        <a:t>1.828</a:t>
                       </a:r>
                     </a:p>
                   </a:txBody>
@@ -22319,7 +22319,7 @@
                           </a:solidFill>
                           <a:latin typeface="Arial"/>
                         </a:rPr>
-                        <a:t>1.480</a:t>
+                        <a:t>1.488</a:t>
                       </a:r>
                     </a:p>
                   </a:txBody>
@@ -22366,7 +22366,7 @@
                           </a:solidFill>
                           <a:latin typeface="Arial"/>
                         </a:rPr>
-                        <a:t>19.745</a:t>
+                        <a:t>19.778</a:t>
                       </a:r>
                     </a:p>
                   </a:txBody>
@@ -22415,7 +22415,7 @@
                           </a:solidFill>
                           <a:latin typeface="Arial"/>
                         </a:rPr>
-                        <a:t>4,0%</a:t>
+                        <a:t>4,3%</a:t>
                       </a:r>
                     </a:p>
                   </a:txBody>
@@ -22462,7 +22462,7 @@
                           </a:solidFill>
                           <a:latin typeface="Arial"/>
                         </a:rPr>
-                        <a:t>9,0%</a:t>
+                        <a:t>9,3%</a:t>
                       </a:r>
                     </a:p>
                   </a:txBody>
@@ -22509,7 +22509,7 @@
                           </a:solidFill>
                           <a:latin typeface="Arial"/>
                         </a:rPr>
-                        <a:t>70,1%</a:t>
+                        <a:t>69,6%</a:t>
                       </a:r>
                     </a:p>
                   </a:txBody>
@@ -22556,7 +22556,7 @@
                           </a:solidFill>
                           <a:latin typeface="Arial"/>
                         </a:rPr>
-                        <a:t>9,3%</a:t>
+                        <a:t>9,2%</a:t>
                       </a:r>
                     </a:p>
                   </a:txBody>
@@ -22836,7 +22836,7 @@
                 </a:solidFill>
                 <a:latin typeface="Arial"/>
               </a:rPr>
-              <a:t>Jumlah ODP  1.480</a:t>
+              <a:t>Jumlah ODP  1.488</a:t>
             </a:r>
           </a:p>
         </p:txBody>
@@ -22871,7 +22871,7 @@
                 </a:solidFill>
                 <a:latin typeface="Arial"/>
               </a:rPr>
-              <a:t>ODP dikunjungi  460 (31,1%)</a:t>
+              <a:t>ODP dikunjungi  451 (30,3%)</a:t>
             </a:r>
           </a:p>
         </p:txBody>
@@ -22941,7 +22941,7 @@
                 </a:solidFill>
                 <a:latin typeface="Arial"/>
               </a:rPr>
-              <a:t>953</a:t>
+              <a:t>933</a:t>
             </a:r>
           </a:p>
         </p:txBody>
@@ -23058,7 +23058,7 @@
                 </a:solidFill>
                 <a:latin typeface="Arial"/>
               </a:rPr>
-              <a:t>Jumlah ODP  448</a:t>
+              <a:t>Jumlah ODP  481</a:t>
             </a:r>
           </a:p>
         </p:txBody>
@@ -23093,7 +23093,7 @@
                 </a:solidFill>
                 <a:latin typeface="Arial"/>
               </a:rPr>
-              <a:t>ODP dikunjungi  388 (86,6%)</a:t>
+              <a:t>ODP dikunjungi  394 (81,9%)</a:t>
             </a:r>
           </a:p>
         </p:txBody>
@@ -23163,7 +23163,7 @@
                 </a:solidFill>
                 <a:latin typeface="Arial"/>
               </a:rPr>
-              <a:t>1.024</a:t>
+              <a:t>1.041</a:t>
             </a:r>
           </a:p>
         </p:txBody>
